--- a/Figures/RefusalIndex-Illustration.pptx
+++ b/Figures/RefusalIndex-Illustration.pptx
@@ -197,7 +197,7 @@
           <a:p>
             <a:fld id="{7D49DD20-33B5-CF41-BBB8-0DFA6D367E98}" type="datetimeFigureOut">
               <a:rPr lang="en-US" smtClean="0"/>
-              <a:t>9/18/25</a:t>
+              <a:t>9/24/25</a:t>
             </a:fld>
             <a:endParaRPr lang="en-US"/>
           </a:p>
@@ -695,7 +695,7 @@
           <a:p>
             <a:fld id="{311EB911-AADD-034F-8902-8BE03DD67A51}" type="datetimeFigureOut">
               <a:rPr lang="en-US" smtClean="0"/>
-              <a:t>9/18/25</a:t>
+              <a:t>9/24/25</a:t>
             </a:fld>
             <a:endParaRPr lang="en-US"/>
           </a:p>
@@ -893,7 +893,7 @@
           <a:p>
             <a:fld id="{311EB911-AADD-034F-8902-8BE03DD67A51}" type="datetimeFigureOut">
               <a:rPr lang="en-US" smtClean="0"/>
-              <a:t>9/18/25</a:t>
+              <a:t>9/24/25</a:t>
             </a:fld>
             <a:endParaRPr lang="en-US"/>
           </a:p>
@@ -1101,7 +1101,7 @@
           <a:p>
             <a:fld id="{311EB911-AADD-034F-8902-8BE03DD67A51}" type="datetimeFigureOut">
               <a:rPr lang="en-US" smtClean="0"/>
-              <a:t>9/18/25</a:t>
+              <a:t>9/24/25</a:t>
             </a:fld>
             <a:endParaRPr lang="en-US"/>
           </a:p>
@@ -1299,7 +1299,7 @@
           <a:p>
             <a:fld id="{311EB911-AADD-034F-8902-8BE03DD67A51}" type="datetimeFigureOut">
               <a:rPr lang="en-US" smtClean="0"/>
-              <a:t>9/18/25</a:t>
+              <a:t>9/24/25</a:t>
             </a:fld>
             <a:endParaRPr lang="en-US"/>
           </a:p>
@@ -1574,7 +1574,7 @@
           <a:p>
             <a:fld id="{311EB911-AADD-034F-8902-8BE03DD67A51}" type="datetimeFigureOut">
               <a:rPr lang="en-US" smtClean="0"/>
-              <a:t>9/18/25</a:t>
+              <a:t>9/24/25</a:t>
             </a:fld>
             <a:endParaRPr lang="en-US"/>
           </a:p>
@@ -1839,7 +1839,7 @@
           <a:p>
             <a:fld id="{311EB911-AADD-034F-8902-8BE03DD67A51}" type="datetimeFigureOut">
               <a:rPr lang="en-US" smtClean="0"/>
-              <a:t>9/18/25</a:t>
+              <a:t>9/24/25</a:t>
             </a:fld>
             <a:endParaRPr lang="en-US"/>
           </a:p>
@@ -2251,7 +2251,7 @@
           <a:p>
             <a:fld id="{311EB911-AADD-034F-8902-8BE03DD67A51}" type="datetimeFigureOut">
               <a:rPr lang="en-US" smtClean="0"/>
-              <a:t>9/18/25</a:t>
+              <a:t>9/24/25</a:t>
             </a:fld>
             <a:endParaRPr lang="en-US"/>
           </a:p>
@@ -2392,7 +2392,7 @@
           <a:p>
             <a:fld id="{311EB911-AADD-034F-8902-8BE03DD67A51}" type="datetimeFigureOut">
               <a:rPr lang="en-US" smtClean="0"/>
-              <a:t>9/18/25</a:t>
+              <a:t>9/24/25</a:t>
             </a:fld>
             <a:endParaRPr lang="en-US"/>
           </a:p>
@@ -2505,7 +2505,7 @@
           <a:p>
             <a:fld id="{311EB911-AADD-034F-8902-8BE03DD67A51}" type="datetimeFigureOut">
               <a:rPr lang="en-US" smtClean="0"/>
-              <a:t>9/18/25</a:t>
+              <a:t>9/24/25</a:t>
             </a:fld>
             <a:endParaRPr lang="en-US"/>
           </a:p>
@@ -2816,7 +2816,7 @@
           <a:p>
             <a:fld id="{311EB911-AADD-034F-8902-8BE03DD67A51}" type="datetimeFigureOut">
               <a:rPr lang="en-US" smtClean="0"/>
-              <a:t>9/18/25</a:t>
+              <a:t>9/24/25</a:t>
             </a:fld>
             <a:endParaRPr lang="en-US"/>
           </a:p>
@@ -3104,7 +3104,7 @@
           <a:p>
             <a:fld id="{311EB911-AADD-034F-8902-8BE03DD67A51}" type="datetimeFigureOut">
               <a:rPr lang="en-US" smtClean="0"/>
-              <a:t>9/18/25</a:t>
+              <a:t>9/24/25</a:t>
             </a:fld>
             <a:endParaRPr lang="en-US"/>
           </a:p>
@@ -3345,7 +3345,7 @@
           <a:p>
             <a:fld id="{311EB911-AADD-034F-8902-8BE03DD67A51}" type="datetimeFigureOut">
               <a:rPr lang="en-US" smtClean="0"/>
-              <a:t>9/18/25</a:t>
+              <a:t>9/24/25</a:t>
             </a:fld>
             <a:endParaRPr lang="en-US"/>
           </a:p>
@@ -4181,7 +4181,7 @@
           </a:prstGeom>
           <a:ln w="25400">
             <a:solidFill>
-              <a:srgbClr val="376664"/>
+              <a:srgbClr val="4F9A92"/>
             </a:solidFill>
           </a:ln>
         </p:spPr>
